--- a/_Lectures/2026_Ecology_Symbosium.pptx
+++ b/_Lectures/2026_Ecology_Symbosium.pptx
@@ -260,7 +260,7 @@
       </p15:sldGuideLst>
     </p:ext>
     <p:ext uri="GoogleSlidesCustomDataVersion2">
-      <go:slidesCustomData xmlns="" xmlns:mc="http://schemas.openxmlformats.org/markup-compatibility/2006" xmlns:mv="urn:schemas-microsoft-com:mac:vml" xmlns:c="http://schemas.openxmlformats.org/drawingml/2006/chart" xmlns:dgm="http://schemas.openxmlformats.org/drawingml/2006/diagram" xmlns:o="urn:schemas-microsoft-com:office:office" xmlns:v="urn:schemas-microsoft-com:vml" xmlns:pvml="urn:schemas-microsoft-com:office:powerpoint" xmlns:com="http://schemas.openxmlformats.org/drawingml/2006/compatibility" xmlns:p14="http://schemas.microsoft.com/office/powerpoint/2010/main" xmlns:p15="http://schemas.microsoft.com/office/powerpoint/2012/main" xmlns:ahyp="http://schemas.microsoft.com/office/drawing/2018/hyperlinkcolor" xmlns:go="http://customooxmlschemas.google.com/" r:id="rId17" roundtripDataSignature="AMtx7mioCNuQhxXxGukZcxLC8XJQtJ7iqA=="/>
+      <go:slidesCustomData xmlns:go="http://customooxmlschemas.google.com/" xmlns:ahyp="http://schemas.microsoft.com/office/drawing/2018/hyperlinkcolor" xmlns:p15="http://schemas.microsoft.com/office/powerpoint/2012/main" xmlns:p14="http://schemas.microsoft.com/office/powerpoint/2010/main" xmlns:com="http://schemas.openxmlformats.org/drawingml/2006/compatibility" xmlns:pvml="urn:schemas-microsoft-com:office:powerpoint" xmlns:v="urn:schemas-microsoft-com:vml" xmlns:o="urn:schemas-microsoft-com:office:office" xmlns:dgm="http://schemas.openxmlformats.org/drawingml/2006/diagram" xmlns:c="http://schemas.openxmlformats.org/drawingml/2006/chart" xmlns:mv="urn:schemas-microsoft-com:mac:vml" xmlns:mc="http://schemas.openxmlformats.org/markup-compatibility/2006" xmlns="" r:id="rId17" roundtripDataSignature="AMtx7mioCNuQhxXxGukZcxLC8XJQtJ7iqA=="/>
     </p:ext>
   </p:extLst>
 </p:presentation>
@@ -11606,7 +11606,7 @@
         <p:spPr>
           <a:xfrm>
             <a:off x="954452" y="2200688"/>
-            <a:ext cx="8094197" cy="3370153"/>
+            <a:ext cx="8094197" cy="3647152"/>
           </a:xfrm>
           <a:prstGeom prst="rect">
             <a:avLst/>
@@ -11666,7 +11666,7 @@
                   </a:schemeClr>
                 </a:solidFill>
               </a:rPr>
-              <a:t>digest the info into essentials</a:t>
+              <a:t>digest the info into essentials (less text)</a:t>
             </a:r>
           </a:p>
           <a:p>
@@ -11762,7 +11762,7 @@
                   </a:schemeClr>
                 </a:solidFill>
               </a:rPr>
-              <a:t>looking into the audience</a:t>
+              <a:t>body language, groups use of space, looking into the audience</a:t>
             </a:r>
           </a:p>
           <a:p>
@@ -11810,7 +11810,7 @@
                   </a:schemeClr>
                 </a:solidFill>
               </a:rPr>
-              <a:t>tuned/practiced </a:t>
+              <a:t>practise alone, but many times as a group </a:t>
             </a:r>
             <a:r>
               <a:rPr lang="en-GB" dirty="0">
@@ -11840,6 +11840,9 @@
               </a:rPr>
               <a:t>coherent slide design (helpful if a single person overseas the process)</a:t>
             </a:r>
+            <a:br>
+              <a:rPr lang="en-GB" dirty="0"/>
+            </a:br>
             <a:endParaRPr lang="en-GB" sz="1800" dirty="0">
               <a:solidFill>
                 <a:schemeClr val="tx1">
